--- a/Day23-Industry-Use-Cases-and-Agentic-Security-SME/Day23_Deck_Industry_Use_Cases_and_Agentic_Security_SME.pptx
+++ b/Day23-Industry-Use-Cases-and-Agentic-Security-SME/Day23_Deck_Industry_Use_Cases_and_Agentic_Security_SME.pptx
@@ -8384,13 +8384,13 @@
           <a:noFill/>
         </p:spPr>
         <p:txBody>
-          <a:bodyPr wrap="square" lIns="0" rIns="0" tIns="0" bIns="0" anchor="t">
-            <a:spAutoFit/>
-          </a:bodyPr>
-          <a:lstStyle/>
-          <a:p>
-            <a:r>
-              <a:rPr sz="1275" b="0" i="0">
+          <a:bodyPr wrap="none" lIns="0" rIns="0" tIns="0" bIns="0" anchor="t">
+            <a:spAutoFit/>
+          </a:bodyPr>
+          <a:lstStyle/>
+          <a:p>
+            <a:r>
+              <a:rPr sz="1122" b="0" i="0">
                 <a:solidFill>
                   <a:srgbClr val="EAF7F5"/>
                 </a:solidFill>
@@ -8401,7 +8401,7 @@
           </a:p>
           <a:p>
             <a:r>
-              <a:rPr sz="1275" b="0" i="0">
+              <a:rPr sz="1122" b="0" i="0">
                 <a:solidFill>
                   <a:srgbClr val="EAF7F5"/>
                 </a:solidFill>
@@ -8412,7 +8412,7 @@
           </a:p>
           <a:p>
             <a:r>
-              <a:rPr sz="1275" b="0" i="0">
+              <a:rPr sz="1122" b="0" i="0">
                 <a:solidFill>
                   <a:srgbClr val="EAF7F5"/>
                 </a:solidFill>
@@ -8423,7 +8423,7 @@
           </a:p>
           <a:p>
             <a:r>
-              <a:rPr sz="1275" b="0" i="0">
+              <a:rPr sz="1122" b="0" i="0">
                 <a:solidFill>
                   <a:srgbClr val="EAF7F5"/>
                 </a:solidFill>
@@ -8434,7 +8434,7 @@
           </a:p>
           <a:p>
             <a:r>
-              <a:rPr sz="1275" b="0" i="0">
+              <a:rPr sz="1122" b="0" i="0">
                 <a:solidFill>
                   <a:srgbClr val="EAF7F5"/>
                 </a:solidFill>
@@ -8445,7 +8445,7 @@
           </a:p>
           <a:p>
             <a:r>
-              <a:rPr sz="1275" b="0" i="0">
+              <a:rPr sz="1122" b="0" i="0">
                 <a:solidFill>
                   <a:srgbClr val="EAF7F5"/>
                 </a:solidFill>
@@ -8456,7 +8456,7 @@
           </a:p>
           <a:p>
             <a:r>
-              <a:rPr sz="1275" b="0" i="0">
+              <a:rPr sz="1122" b="0" i="0">
                 <a:solidFill>
                   <a:srgbClr val="EAF7F5"/>
                 </a:solidFill>
@@ -8467,7 +8467,7 @@
           </a:p>
           <a:p>
             <a:r>
-              <a:rPr sz="1275" b="0" i="0">
+              <a:rPr sz="1122" b="0" i="0">
                 <a:solidFill>
                   <a:srgbClr val="EAF7F5"/>
                 </a:solidFill>
@@ -8478,7 +8478,7 @@
           </a:p>
           <a:p>
             <a:r>
-              <a:rPr sz="1275" b="0" i="0">
+              <a:rPr sz="1122" b="0" i="0">
                 <a:solidFill>
                   <a:srgbClr val="EAF7F5"/>
                 </a:solidFill>
